--- a/docs/presentation/ResearchPilot_AI_Final_Presentation.pptx
+++ b/docs/presentation/ResearchPilot_AI_Final_Presentation.pptx
@@ -26,6 +26,7 @@
     <p:sldId id="274" r:id="rId25"/>
     <p:sldId id="276" r:id="rId27"/>
     <p:sldId id="277" r:id="rId28"/>
+    <p:sldId id="278" r:id="rId29"/>
   </p:sldIdLst>
   <p:sldSz cx="12191695" cy="6858000" type="screen4x3"/>
   <p:notesSz cx="6858000" cy="9144000"/>
@@ -3131,10 +3132,12 @@
             <a:avLst/>
           </a:prstGeom>
           <a:solidFill>
-            <a:srgbClr val="1B2A4A"/>
+            <a:srgbClr val="FFFFFF"/>
           </a:solidFill>
           <a:ln>
-            <a:noFill/>
+            <a:solidFill>
+              <a:srgbClr val="FFFFFF"/>
+            </a:solidFill>
           </a:ln>
         </p:spPr>
         <p:style>
@@ -3167,8 +3170,8 @@
         </p:nvSpPr>
         <p:spPr>
           <a:xfrm>
-            <a:off x="914400" y="2286000"/>
-            <a:ext cx="10332720" cy="1371600"/>
+            <a:off x="914400" y="1371600"/>
+            <a:ext cx="7315200" cy="731520"/>
           </a:xfrm>
           <a:prstGeom prst="rect">
             <a:avLst/>
@@ -3181,15 +3184,16 @@
           </a:bodyPr>
           <a:lstStyle/>
           <a:p>
-            <a:pPr algn="ctr"/>
-            <a:r>
-              <a:rPr sz="6000" b="1" i="0">
-                <a:solidFill>
-                  <a:srgbClr val="FFFFFF"/>
-                </a:solidFill>
-                <a:latin typeface="Calibri"/>
-              </a:rPr>
-              <a:t>ResearchPilot AI</a:t>
+            <a:pPr>
+              <a:defRPr sz="2800" b="1">
+                <a:solidFill>
+                  <a:srgbClr val="000000"/>
+                </a:solidFill>
+                <a:latin typeface="Arial"/>
+              </a:defRPr>
+            </a:pPr>
+            <a:r>
+              <a:t>Project Title – ResearchPilot AI</a:t>
             </a:r>
           </a:p>
         </p:txBody>
@@ -3202,8 +3206,8 @@
         </p:nvSpPr>
         <p:spPr>
           <a:xfrm>
-            <a:off x="914400" y="3840480"/>
-            <a:ext cx="10332720" cy="731520"/>
+            <a:off x="914400" y="2286000"/>
+            <a:ext cx="7315200" cy="731520"/>
           </a:xfrm>
           <a:prstGeom prst="rect">
             <a:avLst/>
@@ -3216,71 +3220,257 @@
           </a:bodyPr>
           <a:lstStyle/>
           <a:p>
-            <a:pPr algn="ctr"/>
-            <a:r>
-              <a:rPr sz="2400" b="0" i="0">
-                <a:solidFill>
-                  <a:srgbClr val="C0CEF0"/>
-                </a:solidFill>
-                <a:latin typeface="Calibri"/>
-              </a:rPr>
-              <a:t>Advanced Document Intelligence &amp; Grounded QA System</a:t>
-            </a:r>
-          </a:p>
-        </p:txBody>
-      </p:sp>
-      <p:sp>
-        <p:nvSpPr>
-          <p:cNvPr id="5" name="Rounded Rectangle 4"/>
-          <p:cNvSpPr/>
-          <p:nvPr/>
-        </p:nvSpPr>
-        <p:spPr>
-          <a:xfrm>
-            <a:off x="5175504" y="4754880"/>
-            <a:ext cx="1828800" cy="365760"/>
-          </a:xfrm>
-          <a:prstGeom prst="roundRect">
-            <a:avLst/>
-          </a:prstGeom>
-          <a:solidFill>
-            <a:srgbClr val="2563EB"/>
-          </a:solidFill>
-          <a:ln>
-            <a:noFill/>
-          </a:ln>
-        </p:spPr>
-        <p:style>
-          <a:lnRef idx="1">
-            <a:schemeClr val="accent1"/>
-          </a:lnRef>
-          <a:fillRef idx="3">
-            <a:schemeClr val="accent1"/>
-          </a:fillRef>
-          <a:effectRef idx="2">
-            <a:schemeClr val="accent1"/>
-          </a:effectRef>
-          <a:fontRef idx="minor">
-            <a:schemeClr val="lt1"/>
-          </a:fontRef>
-        </p:style>
-        <p:txBody>
-          <a:bodyPr rtlCol="0" anchor="ctr" wrap="none" tIns="73152"/>
-          <a:lstStyle/>
-          <a:p>
-            <a:pPr algn="ctr"/>
-            <a:r>
-              <a:rPr sz="1200" b="1">
-                <a:solidFill>
-                  <a:srgbClr val="FFFFFF"/>
-                </a:solidFill>
-                <a:latin typeface="Calibri"/>
-              </a:rPr>
-              <a:t>FINAL PRESENTATION</a:t>
-            </a:r>
-          </a:p>
-        </p:txBody>
-      </p:sp>
+            <a:pPr>
+              <a:defRPr sz="2800" b="1">
+                <a:solidFill>
+                  <a:srgbClr val="000000"/>
+                </a:solidFill>
+                <a:latin typeface="Arial"/>
+              </a:defRPr>
+            </a:pPr>
+            <a:r>
+              <a:t>Domain of Project – Artificial Intelligence / Generative AI</a:t>
+            </a:r>
+          </a:p>
+        </p:txBody>
+      </p:sp>
+      <p:graphicFrame>
+        <p:nvGraphicFramePr>
+          <p:cNvPr id="5" name="Table 4"/>
+          <p:cNvGraphicFramePr>
+            <a:graphicFrameLocks noGrp="1"/>
+          </p:cNvGraphicFramePr>
+          <p:nvPr/>
+        </p:nvGraphicFramePr>
+        <p:xfrm>
+          <a:off x="457200" y="3657600"/>
+          <a:ext cx="8229600" cy="1371600"/>
+        </p:xfrm>
+        <a:graphic>
+          <a:graphicData uri="http://schemas.openxmlformats.org/drawingml/2006/table">
+            <a:tbl>
+              <a:tblPr firstRow="1" bandRow="1">
+                <a:tableStyleId>{5C22544A-7EE6-4342-B048-85BDC9FD1C3A}</a:tableStyleId>
+              </a:tblPr>
+              <a:tblGrid>
+                <a:gridCol w="1828800"/>
+                <a:gridCol w="1828800"/>
+                <a:gridCol w="2743200"/>
+                <a:gridCol w="1828800"/>
+              </a:tblGrid>
+              <a:tr h="685800">
+                <a:tc>
+                  <a:txBody>
+                    <a:bodyPr/>
+                    <a:lstStyle/>
+                    <a:p>
+                      <a:pPr algn="ctr">
+                        <a:defRPr sz="2000">
+                          <a:solidFill>
+                            <a:srgbClr val="000000"/>
+                          </a:solidFill>
+                          <a:latin typeface="Arial"/>
+                        </a:defRPr>
+                      </a:pPr>
+                      <a:r>
+                        <a:t>Student Name</a:t>
+                      </a:r>
+                    </a:p>
+                  </a:txBody>
+                  <a:tcPr>
+                    <a:solidFill>
+                      <a:srgbClr val="5B9BD5"/>
+                    </a:solidFill>
+                  </a:tcPr>
+                </a:tc>
+                <a:tc>
+                  <a:txBody>
+                    <a:bodyPr/>
+                    <a:lstStyle/>
+                    <a:p>
+                      <a:pPr algn="ctr">
+                        <a:defRPr sz="2000">
+                          <a:solidFill>
+                            <a:srgbClr val="000000"/>
+                          </a:solidFill>
+                          <a:latin typeface="Arial"/>
+                        </a:defRPr>
+                      </a:pPr>
+                      <a:r>
+                        <a:t>Roll No</a:t>
+                      </a:r>
+                    </a:p>
+                  </a:txBody>
+                  <a:tcPr>
+                    <a:solidFill>
+                      <a:srgbClr val="5B9BD5"/>
+                    </a:solidFill>
+                  </a:tcPr>
+                </a:tc>
+                <a:tc>
+                  <a:txBody>
+                    <a:bodyPr/>
+                    <a:lstStyle/>
+                    <a:p>
+                      <a:pPr algn="ctr">
+                        <a:defRPr sz="2000">
+                          <a:solidFill>
+                            <a:srgbClr val="000000"/>
+                          </a:solidFill>
+                          <a:latin typeface="Arial"/>
+                        </a:defRPr>
+                      </a:pPr>
+                      <a:r>
+                        <a:t>Email ID</a:t>
+                      </a:r>
+                    </a:p>
+                  </a:txBody>
+                  <a:tcPr>
+                    <a:solidFill>
+                      <a:srgbClr val="5B9BD5"/>
+                    </a:solidFill>
+                  </a:tcPr>
+                </a:tc>
+                <a:tc>
+                  <a:txBody>
+                    <a:bodyPr/>
+                    <a:lstStyle/>
+                    <a:p>
+                      <a:pPr algn="ctr">
+                        <a:defRPr sz="2000">
+                          <a:solidFill>
+                            <a:srgbClr val="000000"/>
+                          </a:solidFill>
+                          <a:latin typeface="Arial"/>
+                        </a:defRPr>
+                      </a:pPr>
+                      <a:r>
+                        <a:t>Mobile number</a:t>
+                      </a:r>
+                    </a:p>
+                    <a:p>
+                      <a:pPr algn="ctr">
+                        <a:defRPr sz="2000">
+                          <a:solidFill>
+                            <a:srgbClr val="000000"/>
+                          </a:solidFill>
+                          <a:latin typeface="Arial"/>
+                        </a:defRPr>
+                      </a:pPr>
+                      <a:r>
+                        <a:t>[WhatsApp]</a:t>
+                      </a:r>
+                    </a:p>
+                  </a:txBody>
+                  <a:tcPr>
+                    <a:solidFill>
+                      <a:srgbClr val="5B9BD5"/>
+                    </a:solidFill>
+                  </a:tcPr>
+                </a:tc>
+              </a:tr>
+              <a:tr h="685800">
+                <a:tc>
+                  <a:txBody>
+                    <a:bodyPr/>
+                    <a:lstStyle/>
+                    <a:p>
+                      <a:pPr algn="ctr">
+                        <a:defRPr sz="2000">
+                          <a:solidFill>
+                            <a:srgbClr val="000000"/>
+                          </a:solidFill>
+                          <a:latin typeface="Arial"/>
+                        </a:defRPr>
+                      </a:pPr>
+                      <a:r>
+                        <a:t>Pirajan M</a:t>
+                      </a:r>
+                    </a:p>
+                  </a:txBody>
+                  <a:tcPr>
+                    <a:solidFill>
+                      <a:srgbClr val="DDEBF7"/>
+                    </a:solidFill>
+                  </a:tcPr>
+                </a:tc>
+                <a:tc>
+                  <a:txBody>
+                    <a:bodyPr/>
+                    <a:lstStyle/>
+                    <a:p>
+                      <a:pPr algn="ctr">
+                        <a:defRPr sz="2000">
+                          <a:solidFill>
+                            <a:srgbClr val="000000"/>
+                          </a:solidFill>
+                          <a:latin typeface="Arial"/>
+                        </a:defRPr>
+                      </a:pPr>
+                      <a:r>
+                        <a:t>2024103549</a:t>
+                      </a:r>
+                    </a:p>
+                  </a:txBody>
+                  <a:tcPr>
+                    <a:solidFill>
+                      <a:srgbClr val="DDEBF7"/>
+                    </a:solidFill>
+                  </a:tcPr>
+                </a:tc>
+                <a:tc>
+                  <a:txBody>
+                    <a:bodyPr/>
+                    <a:lstStyle/>
+                    <a:p>
+                      <a:pPr algn="ctr">
+                        <a:defRPr sz="2000">
+                          <a:solidFill>
+                            <a:srgbClr val="000000"/>
+                          </a:solidFill>
+                          <a:latin typeface="Arial"/>
+                        </a:defRPr>
+                      </a:pPr>
+                      <a:r>
+                        <a:t>niroshanpirajan@gmail.com</a:t>
+                      </a:r>
+                    </a:p>
+                  </a:txBody>
+                  <a:tcPr>
+                    <a:solidFill>
+                      <a:srgbClr val="DDEBF7"/>
+                    </a:solidFill>
+                  </a:tcPr>
+                </a:tc>
+                <a:tc>
+                  <a:txBody>
+                    <a:bodyPr/>
+                    <a:lstStyle/>
+                    <a:p>
+                      <a:pPr algn="ctr">
+                        <a:defRPr sz="2000">
+                          <a:solidFill>
+                            <a:srgbClr val="000000"/>
+                          </a:solidFill>
+                          <a:latin typeface="Arial"/>
+                        </a:defRPr>
+                      </a:pPr>
+                      <a:r>
+                        <a:t>6374657775</a:t>
+                      </a:r>
+                    </a:p>
+                  </a:txBody>
+                  <a:tcPr>
+                    <a:solidFill>
+                      <a:srgbClr val="DDEBF7"/>
+                    </a:solidFill>
+                  </a:tcPr>
+                </a:tc>
+              </a:tr>
+            </a:tbl>
+          </a:graphicData>
+        </a:graphic>
+      </p:graphicFrame>
     </p:spTree>
   </p:cSld>
   <p:clrMapOvr>
@@ -3812,7 +4002,7 @@
                 </a:solidFill>
                 <a:latin typeface="Calibri"/>
               </a:rPr>
-              <a:t>Library &amp; Processing Status</a:t>
+              <a:t>Document Ready &amp; Analysis Generation</a:t>
             </a:r>
           </a:p>
         </p:txBody>
@@ -4998,8 +5188,8 @@
         </p:nvSpPr>
         <p:spPr>
           <a:xfrm>
-            <a:off x="731520" y="1371600"/>
-            <a:ext cx="10698480" cy="4572000"/>
+            <a:off x="731520" y="1097280"/>
+            <a:ext cx="10698480" cy="5303520"/>
           </a:xfrm>
           <a:prstGeom prst="roundRect">
             <a:avLst/>
@@ -5038,15 +5228,19 @@
               <a:spcBef>
                 <a:spcPts val="1500"/>
               </a:spcBef>
-            </a:pPr>
-            <a:r>
-              <a:rPr sz="1600" b="0">
+              <a:defRPr sz="1600">
                 <a:solidFill>
                   <a:srgbClr val="1A203A"/>
                 </a:solidFill>
-                <a:latin typeface="Calibri"/>
-              </a:rPr>
-              <a:t>- Localized Document &amp; Vector Storage: PDFs and ChromaDB embeddings are stored locally, avoiding third-party data leakage.</a:t>
+              </a:defRPr>
+            </a:pPr>
+            <a:r>
+              <a:rPr sz="1600">
+                <a:solidFill>
+                  <a:srgbClr val="1A203A"/>
+                </a:solidFill>
+              </a:rPr>
+              <a:t>- Localized Document &amp; Vector Storage: Uploaded PDFs and vector indexes are stored locally; only the retrieved context required for LLM generation is sent to Gemini.</a:t>
             </a:r>
           </a:p>
           <a:p>
@@ -5876,194 +6070,7 @@
                 </a:solidFill>
                 <a:latin typeface="Calibri"/>
               </a:rPr>
-              <a:t>By strictly tying LLM generation to local document context, we eliminate hallucinations and provide researchers with a trustworthy tool to accelerate their work.</a:t>
-            </a:r>
-          </a:p>
-          <a:p>
-            <a:pPr algn="l">
-              <a:spcBef>
-                <a:spcPts val="2000"/>
-              </a:spcBef>
-            </a:pPr>
-            <a:r>
-              <a:rPr sz="1800" b="0">
-                <a:solidFill>
-                  <a:srgbClr val="4B5563"/>
-                </a:solidFill>
-                <a:latin typeface="Calibri"/>
-              </a:rPr>
-              <a:t>The combination of modern web technologies and advanced AI models yields a highly effective solution for information overload.</a:t>
-            </a:r>
-          </a:p>
-        </p:txBody>
-      </p:sp>
-    </p:spTree>
-  </p:cSld>
-  <p:clrMapOvr>
-    <a:masterClrMapping/>
-  </p:clrMapOvr>
-</p:sld>
-</file>
-
-<file path=ppt/slides/slide20.xml><?xml version="1.0" encoding="utf-8"?>
-<p:sld xmlns:a="http://schemas.openxmlformats.org/drawingml/2006/main" xmlns:p="http://schemas.openxmlformats.org/presentationml/2006/main" xmlns:r="http://schemas.openxmlformats.org/officeDocument/2006/relationships">
-  <p:cSld>
-    <p:bg>
-      <p:bgPr>
-        <a:solidFill>
-          <a:srgbClr val="FFFFFF"/>
-        </a:solidFill>
-        <a:effectLst/>
-      </p:bgPr>
-    </p:bg>
-    <p:spTree>
-      <p:nvGrpSpPr>
-        <p:cNvPr id="1" name=""/>
-        <p:cNvGrpSpPr/>
-        <p:nvPr/>
-      </p:nvGrpSpPr>
-      <p:grpSpPr/>
-      <p:sp>
-        <p:nvSpPr>
-          <p:cNvPr id="2" name="Rectangle 1"/>
-          <p:cNvSpPr/>
-          <p:nvPr/>
-        </p:nvSpPr>
-        <p:spPr>
-          <a:xfrm>
-            <a:off x="0" y="0"/>
-            <a:ext cx="12191695" cy="960120"/>
-          </a:xfrm>
-          <a:prstGeom prst="rect">
-            <a:avLst/>
-          </a:prstGeom>
-          <a:solidFill>
-            <a:srgbClr val="1B2A4A"/>
-          </a:solidFill>
-          <a:ln>
-            <a:noFill/>
-          </a:ln>
-        </p:spPr>
-        <p:style>
-          <a:lnRef idx="1">
-            <a:schemeClr val="accent1"/>
-          </a:lnRef>
-          <a:fillRef idx="3">
-            <a:schemeClr val="accent1"/>
-          </a:fillRef>
-          <a:effectRef idx="2">
-            <a:schemeClr val="accent1"/>
-          </a:effectRef>
-          <a:fontRef idx="minor">
-            <a:schemeClr val="lt1"/>
-          </a:fontRef>
-        </p:style>
-        <p:txBody>
-          <a:bodyPr rtlCol="0" anchor="ctr" wrap="none" lIns="320040" tIns="137160"/>
-          <a:lstStyle/>
-          <a:p>
-            <a:pPr algn="l"/>
-            <a:r>
-              <a:rPr b="1" sz="2600">
-                <a:solidFill>
-                  <a:srgbClr val="FFFFFF"/>
-                </a:solidFill>
-                <a:latin typeface="Calibri"/>
-              </a:rPr>
-              <a:t>Conclusion</a:t>
-            </a:r>
-          </a:p>
-          <a:p>
-            <a:pPr>
-              <a:spcBef>
-                <a:spcPts val="200"/>
-              </a:spcBef>
-            </a:pPr>
-            <a:r>
-              <a:rPr sz="1200">
-                <a:solidFill>
-                  <a:srgbClr val="C0CEF0"/>
-                </a:solidFill>
-                <a:latin typeface="Calibri"/>
-              </a:rPr>
-              <a:t>Project Summary</a:t>
-            </a:r>
-          </a:p>
-        </p:txBody>
-      </p:sp>
-      <p:sp>
-        <p:nvSpPr>
-          <p:cNvPr id="3" name="Rounded Rectangle 2"/>
-          <p:cNvSpPr/>
-          <p:nvPr/>
-        </p:nvSpPr>
-        <p:spPr>
-          <a:xfrm>
-            <a:off x="731520" y="1371600"/>
-            <a:ext cx="10698480" cy="4572000"/>
-          </a:xfrm>
-          <a:prstGeom prst="roundRect">
-            <a:avLst/>
-          </a:prstGeom>
-          <a:solidFill>
-            <a:srgbClr val="FFFFFF"/>
-          </a:solidFill>
-          <a:ln w="9525">
-            <a:solidFill>
-              <a:srgbClr val="C5D5E8"/>
-            </a:solidFill>
-          </a:ln>
-        </p:spPr>
-        <p:style>
-          <a:lnRef idx="1">
-            <a:schemeClr val="accent1"/>
-          </a:lnRef>
-          <a:fillRef idx="3">
-            <a:schemeClr val="accent1"/>
-          </a:fillRef>
-          <a:effectRef idx="2">
-            <a:schemeClr val="accent1"/>
-          </a:effectRef>
-          <a:fontRef idx="minor">
-            <a:schemeClr val="lt1"/>
-          </a:fontRef>
-        </p:style>
-        <p:txBody>
-          <a:bodyPr rtlCol="0" anchor="ctr"/>
-          <a:lstStyle/>
-          <a:p>
-            <a:pPr algn="ctr"/>
-          </a:p>
-          <a:p>
-            <a:pPr algn="l">
-              <a:spcBef>
-                <a:spcPts val="2000"/>
-              </a:spcBef>
-            </a:pPr>
-            <a:r>
-              <a:rPr sz="2000" b="1">
-                <a:solidFill>
-                  <a:srgbClr val="1B2A4A"/>
-                </a:solidFill>
-                <a:latin typeface="Calibri"/>
-              </a:rPr>
-              <a:t>ResearchPilot AI successfully demonstrates a robust, grounded approach to document intelligence.</a:t>
-            </a:r>
-          </a:p>
-          <a:p>
-            <a:pPr algn="l">
-              <a:spcBef>
-                <a:spcPts val="2000"/>
-              </a:spcBef>
-            </a:pPr>
-            <a:r>
-              <a:rPr sz="1800" b="0">
-                <a:solidFill>
-                  <a:srgbClr val="4B5563"/>
-                </a:solidFill>
-                <a:latin typeface="Calibri"/>
-              </a:rPr>
-              <a:t>By strictly tying LLM generation to local document context, we eliminate hallucinations and provide researchers with a trustworthy tool to accelerate their work.</a:t>
+              <a:t>By strictly tying LLM generation to local document context, we significantly reduce unsupported or hallucinated responses and provide researchers with a trustworthy tool to accelerate their work.</a:t>
             </a:r>
           </a:p>
           <a:p>
@@ -6175,29 +6182,29 @@
           </a:bodyPr>
           <a:lstStyle/>
           <a:p>
-            <a:pPr algn="ctr"/>
-            <a:r>
-              <a:rPr sz="6000" b="1" i="0">
-                <a:solidFill>
-                  <a:srgbClr val="FFFFFF"/>
-                </a:solidFill>
-                <a:latin typeface="Calibri"/>
-              </a:rPr>
-              <a:t>Questions &amp; Answers</a:t>
-            </a:r>
-          </a:p>
-        </p:txBody>
-      </p:sp>
-      <p:sp>
-        <p:nvSpPr>
-          <p:cNvPr id="4" name="TextBox 3"/>
+            <a:pPr algn="ctr">
+              <a:defRPr>
+                <a:solidFill>
+                  <a:srgbClr val="000000"/>
+                </a:solidFill>
+              </a:defRPr>
+            </a:pPr>
+            <a:r>
+              <a:t>Reference / GitHub Link</a:t>
+            </a:r>
+          </a:p>
+        </p:txBody>
+      </p:sp>
+      <p:sp>
+        <p:nvSpPr>
+          <p:cNvPr id="5" name="TextBox 4"/>
           <p:cNvSpPr txBox="1"/>
           <p:nvPr/>
         </p:nvSpPr>
         <p:spPr>
           <a:xfrm>
-            <a:off x="914400" y="3840480"/>
-            <a:ext cx="10332720" cy="731520"/>
+            <a:off x="914400" y="4572000"/>
+            <a:ext cx="10360152" cy="457200"/>
           </a:xfrm>
           <a:prstGeom prst="rect">
             <a:avLst/>
@@ -6212,26 +6219,26 @@
           <a:p>
             <a:pPr algn="ctr"/>
             <a:r>
-              <a:rPr sz="2400" b="0" i="0">
-                <a:solidFill>
-                  <a:srgbClr val="C0CEF0"/>
-                </a:solidFill>
-                <a:latin typeface="Calibri"/>
-              </a:rPr>
-              <a:t>Thank you for your attention.</a:t>
-            </a:r>
-          </a:p>
-        </p:txBody>
-      </p:sp>
-      <p:sp>
-        <p:nvSpPr>
-          <p:cNvPr id="5" name="TextBox 4"/>
+              <a:rPr sz="1800" b="1" i="0">
+                <a:solidFill>
+                  <a:srgbClr val="FFFFFF"/>
+                </a:solidFill>
+                <a:latin typeface="Calibri"/>
+              </a:rPr>
+              <a:t>Source Code &amp; Implementation</a:t>
+            </a:r>
+          </a:p>
+        </p:txBody>
+      </p:sp>
+      <p:sp>
+        <p:nvSpPr>
+          <p:cNvPr id="6" name="TextBox 5"/>
           <p:cNvSpPr txBox="1"/>
           <p:nvPr/>
         </p:nvSpPr>
         <p:spPr>
           <a:xfrm>
-            <a:off x="914400" y="4572000"/>
+            <a:off x="914400" y="5029200"/>
             <a:ext cx="10360152" cy="457200"/>
           </a:xfrm>
           <a:prstGeom prst="rect">
@@ -6247,27 +6254,85 @@
           <a:p>
             <a:pPr algn="ctr"/>
             <a:r>
-              <a:rPr sz="1800" b="1" i="0">
-                <a:solidFill>
-                  <a:srgbClr val="FFFFFF"/>
-                </a:solidFill>
-                <a:latin typeface="Calibri"/>
-              </a:rPr>
-              <a:t>Source Code &amp; Implementation</a:t>
-            </a:r>
-          </a:p>
-        </p:txBody>
-      </p:sp>
-      <p:sp>
-        <p:nvSpPr>
-          <p:cNvPr id="6" name="TextBox 5"/>
+              <a:rPr sz="1600" b="0" i="0">
+                <a:solidFill>
+                  <a:srgbClr val="EBF3FF"/>
+                </a:solidFill>
+                <a:latin typeface="Calibri"/>
+              </a:rPr>
+              <a:t>GitHub Repository: https://github.com/Pirajan-07/ResearchPilot-AI</a:t>
+            </a:r>
+          </a:p>
+        </p:txBody>
+      </p:sp>
+    </p:spTree>
+  </p:cSld>
+  <p:clrMapOvr>
+    <a:masterClrMapping/>
+  </p:clrMapOvr>
+</p:sld>
+</file>
+
+<file path=ppt/slides/slide22.xml><?xml version="1.0" encoding="utf-8"?>
+<p:sld xmlns:a="http://schemas.openxmlformats.org/drawingml/2006/main" xmlns:p="http://schemas.openxmlformats.org/presentationml/2006/main" xmlns:r="http://schemas.openxmlformats.org/officeDocument/2006/relationships">
+  <p:cSld>
+    <p:spTree>
+      <p:nvGrpSpPr>
+        <p:cNvPr id="1" name=""/>
+        <p:cNvGrpSpPr/>
+        <p:nvPr/>
+      </p:nvGrpSpPr>
+      <p:grpSpPr/>
+      <p:sp>
+        <p:nvSpPr>
+          <p:cNvPr id="2" name="Rectangle 1"/>
+          <p:cNvSpPr/>
+          <p:nvPr/>
+        </p:nvSpPr>
+        <p:spPr>
+          <a:xfrm>
+            <a:off x="0" y="0"/>
+            <a:ext cx="12191695" cy="6858000"/>
+          </a:xfrm>
+          <a:prstGeom prst="rect">
+            <a:avLst/>
+          </a:prstGeom>
+          <a:solidFill>
+            <a:srgbClr val="1B2A4A"/>
+          </a:solidFill>
+        </p:spPr>
+        <p:style>
+          <a:lnRef idx="1">
+            <a:schemeClr val="accent1"/>
+          </a:lnRef>
+          <a:fillRef idx="3">
+            <a:schemeClr val="accent1"/>
+          </a:fillRef>
+          <a:effectRef idx="2">
+            <a:schemeClr val="accent1"/>
+          </a:effectRef>
+          <a:fontRef idx="minor">
+            <a:schemeClr val="lt1"/>
+          </a:fontRef>
+        </p:style>
+        <p:txBody>
+          <a:bodyPr rtlCol="0" anchor="ctr"/>
+          <a:lstStyle/>
+          <a:p>
+            <a:pPr algn="ctr"/>
+          </a:p>
+        </p:txBody>
+      </p:sp>
+      <p:sp>
+        <p:nvSpPr>
+          <p:cNvPr id="3" name="TextBox 2"/>
           <p:cNvSpPr txBox="1"/>
           <p:nvPr/>
         </p:nvSpPr>
         <p:spPr>
           <a:xfrm>
-            <a:off x="914400" y="5029200"/>
-            <a:ext cx="10360152" cy="457200"/>
+            <a:off x="914400" y="2286000"/>
+            <a:ext cx="10332720" cy="1371600"/>
           </a:xfrm>
           <a:prstGeom prst="rect">
             <a:avLst/>
@@ -6275,20 +6340,55 @@
           <a:noFill/>
         </p:spPr>
         <p:txBody>
-          <a:bodyPr wrap="square">
+          <a:bodyPr wrap="none">
             <a:spAutoFit/>
           </a:bodyPr>
           <a:lstStyle/>
           <a:p>
-            <a:pPr algn="ctr"/>
-            <a:r>
-              <a:rPr sz="1600" b="0" i="0">
-                <a:solidFill>
-                  <a:srgbClr val="EBF3FF"/>
-                </a:solidFill>
-                <a:latin typeface="Calibri"/>
-              </a:rPr>
-              <a:t>GitHub Repository: https://github.com/niros/ResearchPilot-AI</a:t>
+            <a:pPr>
+              <a:defRPr>
+                <a:solidFill>
+                  <a:srgbClr val="000000"/>
+                </a:solidFill>
+              </a:defRPr>
+            </a:pPr>
+            <a:r>
+              <a:t>Questions &amp; Answers</a:t>
+            </a:r>
+          </a:p>
+        </p:txBody>
+      </p:sp>
+      <p:sp>
+        <p:nvSpPr>
+          <p:cNvPr id="4" name="TextBox 3"/>
+          <p:cNvSpPr txBox="1"/>
+          <p:nvPr/>
+        </p:nvSpPr>
+        <p:spPr>
+          <a:xfrm>
+            <a:off x="914400" y="3840480"/>
+            <a:ext cx="10332720" cy="731520"/>
+          </a:xfrm>
+          <a:prstGeom prst="rect">
+            <a:avLst/>
+          </a:prstGeom>
+          <a:noFill/>
+        </p:spPr>
+        <p:txBody>
+          <a:bodyPr wrap="none">
+            <a:spAutoFit/>
+          </a:bodyPr>
+          <a:lstStyle/>
+          <a:p>
+            <a:pPr>
+              <a:defRPr>
+                <a:solidFill>
+                  <a:srgbClr val="000000"/>
+                </a:solidFill>
+              </a:defRPr>
+            </a:pPr>
+            <a:r>
+              <a:t>Thank you for your attention.</a:t>
             </a:r>
           </a:p>
         </p:txBody>
@@ -6827,7 +6927,7 @@
                 </a:solidFill>
                 <a:latin typeface="Calibri"/>
               </a:rPr>
-              <a:t>It uses a localized vector database to store document embeddings and enforces strict context boundaries during generation to eliminate hallucinations.</a:t>
+              <a:t>It uses a localized vector database to store document embeddings and enforces strict context boundaries during generation to significantly reduce unsupported or hallucinated responses by strictly grounding generation in retrieved document context.</a:t>
             </a:r>
           </a:p>
         </p:txBody>
@@ -8123,7 +8223,7 @@
                 </a:solidFill>
                 <a:latin typeface="Calibri"/>
               </a:rPr>
-              <a:t>ChromaDB</a:t>
+              <a:t>Local Embeddings</a:t>
             </a:r>
           </a:p>
         </p:txBody>
@@ -8244,7 +8344,7 @@
                 </a:solidFill>
                 <a:latin typeface="Calibri"/>
               </a:rPr>
-              <a:t>Local Embeddings</a:t>
+              <a:t>ChromaDB</a:t>
             </a:r>
           </a:p>
         </p:txBody>
@@ -8257,8 +8357,8 @@
         </p:nvSpPr>
         <p:spPr>
           <a:xfrm>
-            <a:off x="5998464" y="3657600"/>
-            <a:ext cx="182880" cy="914400"/>
+            <a:off x="7772400" y="5029200"/>
+            <a:ext cx="182880" cy="91440"/>
           </a:xfrm>
           <a:prstGeom prst="downArrow">
             <a:avLst/>
@@ -10330,8 +10430,8 @@
         </p:nvSpPr>
         <p:spPr>
           <a:xfrm>
-            <a:off x="2286000" y="4114800"/>
-            <a:ext cx="7616952" cy="1828800"/>
+            <a:off x="2286000" y="3840480"/>
+            <a:ext cx="7616952" cy="2286000"/>
           </a:xfrm>
           <a:prstGeom prst="roundRect">
             <a:avLst/>
